--- a/public/fun/pack/pptx/newspro/카드뉴스프리미엄_01_알뜰생활팁_아이보리로즈골드.pptx
+++ b/public/fun/pack/pptx/newspro/카드뉴스프리미엄_01_알뜰생활팁_아이보리로즈골드.pptx
@@ -113,12 +113,12 @@
   <p:extLst>
     <p:ext uri="{521415D9-36F7-43E2-AB2F-B90AF26B5E84}">
       <p14:sectionLst xmlns:p14="http://schemas.microsoft.com/office/powerpoint/2010/main">
-        <p14:section name="시작" id="{E582CD4C-C6BA-41E1-B86D-BF8A32567FC3}">
+        <p14:section name="시작" id="{CCA48205-0590-4ADB-9C30-D45DF11695B0}">
           <p14:sldIdLst>
             <p14:sldId id="256"/>
           </p14:sldIdLst>
         </p14:section>
-        <p14:section name="본문" id="{11EA84C4-82C1-4BFE-8698-3CEE325634D8}">
+        <p14:section name="본문" id="{77B35824-D0D0-4955-8CB3-198554190953}">
           <p14:sldIdLst>
             <p14:sldId id="257"/>
             <p14:sldId id="258"/>
@@ -127,7 +127,7 @@
             <p14:sldId id="261"/>
           </p14:sldIdLst>
         </p14:section>
-        <p14:section name="마무리" id="{5D3D8CCF-2ECF-446D-85CD-233105B3C1BF}">
+        <p14:section name="마무리" id="{DBB25B32-9CDA-4333-AB66-DE1680EADE02}">
           <p14:sldIdLst>
             <p14:sldId id="262"/>
           </p14:sldIdLst>
@@ -1664,7 +1664,7 @@
             </a:lvl1pPr>
           </a:lstStyle>
           <a:p>
-            <a:fld id="{AFB2DEC8-DB8D-4E73-B660-42C271693F81}" type="slidenum">
+            <a:fld id="{B25768A1-1C0E-4A67-AFA6-E39A2FB1C587}" type="slidenum">
               <a:rPr lang="en-US"/>
               <a:t>‹#›</a:t>
             </a:fld>
@@ -2538,7 +2538,7 @@
             </a:lvl1pPr>
           </a:lstStyle>
           <a:p>
-            <a:fld id="{C611739A-4736-4650-9863-253231EF9150}" type="slidenum">
+            <a:fld id="{33F23751-08D5-48C2-8B2B-C5DF25FD7AFE}" type="slidenum">
               <a:rPr lang="en-US"/>
               <a:t>‹#›</a:t>
             </a:fld>
@@ -3291,7 +3291,7 @@
             </a:lvl1pPr>
           </a:lstStyle>
           <a:p>
-            <a:fld id="{DA14C697-5B7D-41DA-A752-E51AC7C719F3}" type="slidenum">
+            <a:fld id="{52AE50F8-2981-48CA-B6A6-65795880363A}" type="slidenum">
               <a:rPr lang="en-US"/>
               <a:t>‹#›</a:t>
             </a:fld>
@@ -4224,7 +4224,7 @@
           <a:p>
             <a:r>
               <a:rPr lang="ko-KR"/>
-              <a:t>새 학기 전에 점검할 지출 다섯 가지</a:t>
+              <a:t>시작 전에 점검할 지출 다섯 가지</a:t>
             </a:r>
           </a:p>
         </p:txBody>
@@ -4353,7 +4353,7 @@
           <a:bodyPr/>
           <a:lstStyle/>
           <a:p>
-            <a:fld id="{FCA59AC2-16E0-447A-B38B-DD19C459FB82}" type="slidenum">
+            <a:fld id="{BD413407-4245-48BA-920A-1E4ED6DDEF36}" type="slidenum">
               <a:rPr lang="en-US"/>
               <a:t>‹#›</a:t>
             </a:fld>
@@ -4519,7 +4519,7 @@
           <a:bodyPr/>
           <a:lstStyle/>
           <a:p>
-            <a:fld id="{5EFF3B72-79DA-45ED-BFB8-523DE9DB9A66}" type="slidenum">
+            <a:fld id="{EF7C62A8-221E-40D3-8AB4-B09186AB324E}" type="slidenum">
               <a:rPr lang="en-US"/>
               <a:t>‹#›</a:t>
             </a:fld>
@@ -4685,7 +4685,7 @@
           <a:bodyPr/>
           <a:lstStyle/>
           <a:p>
-            <a:fld id="{67997173-7533-4264-BABF-08FAC0E02A9C}" type="slidenum">
+            <a:fld id="{D4329672-603C-4D1A-871F-A265A832E645}" type="slidenum">
               <a:rPr lang="en-US"/>
               <a:t>‹#›</a:t>
             </a:fld>
@@ -4851,7 +4851,7 @@
           <a:bodyPr/>
           <a:lstStyle/>
           <a:p>
-            <a:fld id="{FD83FFE1-FDB9-4ADA-AEB5-9A73D87C2690}" type="slidenum">
+            <a:fld id="{1DAB131A-06CA-4C3D-9827-81572C774A2E}" type="slidenum">
               <a:rPr lang="en-US"/>
               <a:t>‹#›</a:t>
             </a:fld>
@@ -5017,7 +5017,7 @@
           <a:bodyPr/>
           <a:lstStyle/>
           <a:p>
-            <a:fld id="{52261D5B-F90B-4A95-A9E7-85409D6070CF}" type="slidenum">
+            <a:fld id="{5F8329DE-D3AA-46A7-A321-44184B3324EF}" type="slidenum">
               <a:rPr lang="en-US"/>
               <a:t>‹#›</a:t>
             </a:fld>
